--- a/docs/pptx/entire/ritu-entire-linsubhr-disc-death.pptx
+++ b/docs/pptx/entire/ritu-entire-linsubhr-disc-death.pptx
@@ -3046,509 +3046,509 @@
           <p:spPr>
             <a:xfrm>
               <a:off x="1172049" y="2073503"/>
-              <a:ext cx="7090630" cy="3291039"/>
+              <a:ext cx="7090630" cy="3291768"/>
             </a:xfrm>
             <a:custGeom>
               <a:avLst/>
               <a:pathLst>
-                <a:path w="7090630" h="3291039">
+                <a:path w="7090630" h="3291768">
                   <a:moveTo>
-                    <a:pt x="2480192" y="0"/>
+                    <a:pt x="2486068" y="0"/>
                   </a:moveTo>
                   <a:lnTo>
-                    <a:pt x="2506788" y="58496"/>
-                  </a:lnTo>
-                  <a:lnTo>
-                    <a:pt x="2578410" y="209101"/>
-                  </a:lnTo>
-                  <a:lnTo>
-                    <a:pt x="2650033" y="353084"/>
-                  </a:lnTo>
-                  <a:lnTo>
-                    <a:pt x="2721655" y="490736"/>
-                  </a:lnTo>
-                  <a:lnTo>
-                    <a:pt x="2793278" y="622335"/>
-                  </a:lnTo>
-                  <a:lnTo>
-                    <a:pt x="2864901" y="748149"/>
-                  </a:lnTo>
-                  <a:lnTo>
-                    <a:pt x="2936523" y="868430"/>
-                  </a:lnTo>
-                  <a:lnTo>
-                    <a:pt x="3008146" y="983423"/>
-                  </a:lnTo>
-                  <a:lnTo>
-                    <a:pt x="3079768" y="1093360"/>
-                  </a:lnTo>
-                  <a:lnTo>
-                    <a:pt x="3151391" y="1198463"/>
-                  </a:lnTo>
-                  <a:lnTo>
-                    <a:pt x="3223013" y="1298944"/>
-                  </a:lnTo>
-                  <a:lnTo>
-                    <a:pt x="3294636" y="1395008"/>
-                  </a:lnTo>
-                  <a:lnTo>
-                    <a:pt x="3366258" y="1486848"/>
-                  </a:lnTo>
-                  <a:lnTo>
-                    <a:pt x="3437881" y="1574649"/>
-                  </a:lnTo>
-                  <a:lnTo>
-                    <a:pt x="3509503" y="1658590"/>
-                  </a:lnTo>
-                  <a:lnTo>
-                    <a:pt x="3581126" y="1738841"/>
-                  </a:lnTo>
-                  <a:lnTo>
-                    <a:pt x="3652748" y="1815562"/>
-                  </a:lnTo>
-                  <a:lnTo>
-                    <a:pt x="3724371" y="1888911"/>
-                  </a:lnTo>
-                  <a:lnTo>
-                    <a:pt x="3795993" y="1959034"/>
-                  </a:lnTo>
-                  <a:lnTo>
-                    <a:pt x="3867616" y="2026074"/>
-                  </a:lnTo>
-                  <a:lnTo>
-                    <a:pt x="3939238" y="2090167"/>
-                  </a:lnTo>
-                  <a:lnTo>
-                    <a:pt x="4010861" y="2151441"/>
-                  </a:lnTo>
-                  <a:lnTo>
-                    <a:pt x="4082483" y="2210021"/>
-                  </a:lnTo>
-                  <a:lnTo>
-                    <a:pt x="4154106" y="2266025"/>
-                  </a:lnTo>
-                  <a:lnTo>
-                    <a:pt x="4225729" y="2319567"/>
-                  </a:lnTo>
-                  <a:lnTo>
-                    <a:pt x="4297351" y="2370755"/>
-                  </a:lnTo>
-                  <a:lnTo>
-                    <a:pt x="4368974" y="2419692"/>
-                  </a:lnTo>
-                  <a:lnTo>
-                    <a:pt x="4440596" y="2466478"/>
-                  </a:lnTo>
-                  <a:lnTo>
-                    <a:pt x="4512219" y="2511206"/>
-                  </a:lnTo>
-                  <a:lnTo>
-                    <a:pt x="4583841" y="2553968"/>
-                  </a:lnTo>
-                  <a:lnTo>
-                    <a:pt x="4655464" y="2594849"/>
-                  </a:lnTo>
-                  <a:lnTo>
-                    <a:pt x="4727086" y="2633933"/>
-                  </a:lnTo>
-                  <a:lnTo>
-                    <a:pt x="4798709" y="2661323"/>
-                  </a:lnTo>
-                  <a:lnTo>
-                    <a:pt x="4870331" y="2676389"/>
-                  </a:lnTo>
-                  <a:lnTo>
-                    <a:pt x="4941954" y="2691180"/>
-                  </a:lnTo>
-                  <a:lnTo>
-                    <a:pt x="5013576" y="2705700"/>
-                  </a:lnTo>
-                  <a:lnTo>
-                    <a:pt x="5085199" y="2719954"/>
-                  </a:lnTo>
-                  <a:lnTo>
-                    <a:pt x="5156821" y="2733947"/>
-                  </a:lnTo>
-                  <a:lnTo>
-                    <a:pt x="5228444" y="2747683"/>
-                  </a:lnTo>
-                  <a:lnTo>
-                    <a:pt x="5300066" y="2761168"/>
-                  </a:lnTo>
-                  <a:lnTo>
-                    <a:pt x="5371689" y="2774405"/>
-                  </a:lnTo>
-                  <a:lnTo>
-                    <a:pt x="5443311" y="2787401"/>
-                  </a:lnTo>
-                  <a:lnTo>
-                    <a:pt x="5514934" y="2800158"/>
-                  </a:lnTo>
-                  <a:lnTo>
-                    <a:pt x="5586557" y="2812681"/>
-                  </a:lnTo>
-                  <a:lnTo>
-                    <a:pt x="5658179" y="2824975"/>
-                  </a:lnTo>
-                  <a:lnTo>
-                    <a:pt x="5729802" y="2837044"/>
-                  </a:lnTo>
-                  <a:lnTo>
-                    <a:pt x="5801424" y="2848891"/>
-                  </a:lnTo>
-                  <a:lnTo>
-                    <a:pt x="5873047" y="2860522"/>
-                  </a:lnTo>
-                  <a:lnTo>
-                    <a:pt x="5944669" y="2871939"/>
-                  </a:lnTo>
-                  <a:lnTo>
-                    <a:pt x="6016292" y="2883148"/>
-                  </a:lnTo>
-                  <a:lnTo>
-                    <a:pt x="6087914" y="2894151"/>
-                  </a:lnTo>
-                  <a:lnTo>
-                    <a:pt x="6159537" y="2904952"/>
-                  </a:lnTo>
-                  <a:lnTo>
-                    <a:pt x="6231159" y="2915556"/>
-                  </a:lnTo>
-                  <a:lnTo>
-                    <a:pt x="6302782" y="2925965"/>
-                  </a:lnTo>
-                  <a:lnTo>
-                    <a:pt x="6374404" y="2936184"/>
-                  </a:lnTo>
-                  <a:lnTo>
-                    <a:pt x="6446027" y="2946215"/>
-                  </a:lnTo>
-                  <a:lnTo>
-                    <a:pt x="6517649" y="2956063"/>
-                  </a:lnTo>
-                  <a:lnTo>
-                    <a:pt x="6589272" y="2965730"/>
-                  </a:lnTo>
-                  <a:lnTo>
-                    <a:pt x="6660894" y="2975220"/>
-                  </a:lnTo>
-                  <a:lnTo>
-                    <a:pt x="6732517" y="2984536"/>
-                  </a:lnTo>
-                  <a:lnTo>
-                    <a:pt x="6804139" y="2993682"/>
-                  </a:lnTo>
-                  <a:lnTo>
-                    <a:pt x="6875762" y="3002660"/>
-                  </a:lnTo>
-                  <a:lnTo>
-                    <a:pt x="6947385" y="3011473"/>
-                  </a:lnTo>
-                  <a:lnTo>
-                    <a:pt x="7019007" y="3020125"/>
-                  </a:lnTo>
-                  <a:lnTo>
-                    <a:pt x="7090630" y="3028619"/>
-                  </a:lnTo>
-                  <a:lnTo>
-                    <a:pt x="7090630" y="3291039"/>
-                  </a:lnTo>
-                  <a:lnTo>
-                    <a:pt x="7019007" y="3282176"/>
-                  </a:lnTo>
-                  <a:lnTo>
-                    <a:pt x="6947385" y="3272906"/>
-                  </a:lnTo>
-                  <a:lnTo>
-                    <a:pt x="6875762" y="3263209"/>
-                  </a:lnTo>
-                  <a:lnTo>
-                    <a:pt x="6804139" y="3253066"/>
-                  </a:lnTo>
-                  <a:lnTo>
-                    <a:pt x="6732517" y="3242457"/>
-                  </a:lnTo>
-                  <a:lnTo>
-                    <a:pt x="6660894" y="3231359"/>
-                  </a:lnTo>
-                  <a:lnTo>
-                    <a:pt x="6589272" y="3219752"/>
-                  </a:lnTo>
-                  <a:lnTo>
-                    <a:pt x="6517649" y="3207610"/>
-                  </a:lnTo>
-                  <a:lnTo>
-                    <a:pt x="6446027" y="3194911"/>
-                  </a:lnTo>
-                  <a:lnTo>
-                    <a:pt x="6374404" y="3181627"/>
-                  </a:lnTo>
-                  <a:lnTo>
-                    <a:pt x="6302782" y="3167732"/>
-                  </a:lnTo>
-                  <a:lnTo>
-                    <a:pt x="6231159" y="3153198"/>
-                  </a:lnTo>
-                  <a:lnTo>
-                    <a:pt x="6159537" y="3137996"/>
-                  </a:lnTo>
-                  <a:lnTo>
-                    <a:pt x="6087914" y="3122094"/>
-                  </a:lnTo>
-                  <a:lnTo>
-                    <a:pt x="6016292" y="3105461"/>
-                  </a:lnTo>
-                  <a:lnTo>
-                    <a:pt x="5944669" y="3088064"/>
-                  </a:lnTo>
-                  <a:lnTo>
-                    <a:pt x="5873047" y="3069866"/>
-                  </a:lnTo>
-                  <a:lnTo>
-                    <a:pt x="5801424" y="3050831"/>
-                  </a:lnTo>
-                  <a:lnTo>
-                    <a:pt x="5729802" y="3030921"/>
-                  </a:lnTo>
-                  <a:lnTo>
-                    <a:pt x="5658179" y="3010095"/>
-                  </a:lnTo>
-                  <a:lnTo>
-                    <a:pt x="5586557" y="2988311"/>
-                  </a:lnTo>
-                  <a:lnTo>
-                    <a:pt x="5514934" y="2965525"/>
-                  </a:lnTo>
-                  <a:lnTo>
-                    <a:pt x="5443311" y="2941691"/>
-                  </a:lnTo>
-                  <a:lnTo>
-                    <a:pt x="5371689" y="2916762"/>
-                  </a:lnTo>
-                  <a:lnTo>
-                    <a:pt x="5300066" y="2890685"/>
-                  </a:lnTo>
-                  <a:lnTo>
-                    <a:pt x="5228444" y="2863410"/>
-                  </a:lnTo>
-                  <a:lnTo>
-                    <a:pt x="5156821" y="2834880"/>
-                  </a:lnTo>
-                  <a:lnTo>
-                    <a:pt x="5085199" y="2805038"/>
-                  </a:lnTo>
-                  <a:lnTo>
-                    <a:pt x="5013576" y="2773823"/>
-                  </a:lnTo>
-                  <a:lnTo>
-                    <a:pt x="4941954" y="2741173"/>
-                  </a:lnTo>
-                  <a:lnTo>
-                    <a:pt x="4870331" y="2707021"/>
-                  </a:lnTo>
-                  <a:lnTo>
-                    <a:pt x="4798709" y="2671298"/>
-                  </a:lnTo>
-                  <a:lnTo>
-                    <a:pt x="4727086" y="2645975"/>
-                  </a:lnTo>
-                  <a:lnTo>
-                    <a:pt x="4655464" y="2630340"/>
-                  </a:lnTo>
-                  <a:lnTo>
-                    <a:pt x="4583841" y="2614414"/>
-                  </a:lnTo>
-                  <a:lnTo>
-                    <a:pt x="4512219" y="2598190"/>
-                  </a:lnTo>
-                  <a:lnTo>
-                    <a:pt x="4440596" y="2581664"/>
-                  </a:lnTo>
-                  <a:lnTo>
-                    <a:pt x="4368974" y="2564830"/>
-                  </a:lnTo>
-                  <a:lnTo>
-                    <a:pt x="4297351" y="2547681"/>
-                  </a:lnTo>
-                  <a:lnTo>
-                    <a:pt x="4225729" y="2530212"/>
-                  </a:lnTo>
-                  <a:lnTo>
-                    <a:pt x="4154106" y="2512417"/>
-                  </a:lnTo>
-                  <a:lnTo>
-                    <a:pt x="4082483" y="2494290"/>
-                  </a:lnTo>
-                  <a:lnTo>
-                    <a:pt x="4010861" y="2475825"/>
-                  </a:lnTo>
-                  <a:lnTo>
-                    <a:pt x="3939238" y="2457015"/>
-                  </a:lnTo>
-                  <a:lnTo>
-                    <a:pt x="3867616" y="2437855"/>
-                  </a:lnTo>
-                  <a:lnTo>
-                    <a:pt x="3795993" y="2418336"/>
-                  </a:lnTo>
-                  <a:lnTo>
-                    <a:pt x="3724371" y="2398454"/>
-                  </a:lnTo>
-                  <a:lnTo>
-                    <a:pt x="3652748" y="2378200"/>
-                  </a:lnTo>
-                  <a:lnTo>
-                    <a:pt x="3581126" y="2357568"/>
-                  </a:lnTo>
-                  <a:lnTo>
-                    <a:pt x="3509503" y="2336552"/>
-                  </a:lnTo>
-                  <a:lnTo>
-                    <a:pt x="3437881" y="2315143"/>
-                  </a:lnTo>
-                  <a:lnTo>
-                    <a:pt x="3366258" y="2293334"/>
-                  </a:lnTo>
-                  <a:lnTo>
-                    <a:pt x="3294636" y="2271119"/>
-                  </a:lnTo>
-                  <a:lnTo>
-                    <a:pt x="3223013" y="2248489"/>
-                  </a:lnTo>
-                  <a:lnTo>
-                    <a:pt x="3151391" y="2225437"/>
-                  </a:lnTo>
-                  <a:lnTo>
-                    <a:pt x="3079768" y="2201954"/>
-                  </a:lnTo>
-                  <a:lnTo>
-                    <a:pt x="3008146" y="2178033"/>
-                  </a:lnTo>
-                  <a:lnTo>
-                    <a:pt x="2936523" y="2153666"/>
-                  </a:lnTo>
-                  <a:lnTo>
-                    <a:pt x="2864901" y="2128844"/>
-                  </a:lnTo>
-                  <a:lnTo>
-                    <a:pt x="2793278" y="2103559"/>
-                  </a:lnTo>
-                  <a:lnTo>
-                    <a:pt x="2721655" y="2077802"/>
-                  </a:lnTo>
-                  <a:lnTo>
-                    <a:pt x="2650033" y="2051565"/>
-                  </a:lnTo>
-                  <a:lnTo>
-                    <a:pt x="2578410" y="2024837"/>
-                  </a:lnTo>
-                  <a:lnTo>
-                    <a:pt x="2506788" y="1997611"/>
-                  </a:lnTo>
-                  <a:lnTo>
-                    <a:pt x="2435165" y="1969877"/>
-                  </a:lnTo>
-                  <a:lnTo>
-                    <a:pt x="2363543" y="1941625"/>
-                  </a:lnTo>
-                  <a:lnTo>
-                    <a:pt x="2291920" y="1912846"/>
-                  </a:lnTo>
-                  <a:lnTo>
-                    <a:pt x="2220298" y="1883530"/>
-                  </a:lnTo>
-                  <a:lnTo>
-                    <a:pt x="2148675" y="1853667"/>
-                  </a:lnTo>
-                  <a:lnTo>
-                    <a:pt x="2077053" y="1823247"/>
-                  </a:lnTo>
-                  <a:lnTo>
-                    <a:pt x="2005430" y="1792258"/>
-                  </a:lnTo>
-                  <a:lnTo>
-                    <a:pt x="1933808" y="1760692"/>
-                  </a:lnTo>
-                  <a:lnTo>
-                    <a:pt x="1862185" y="1728536"/>
-                  </a:lnTo>
-                  <a:lnTo>
-                    <a:pt x="1790563" y="1695781"/>
-                  </a:lnTo>
-                  <a:lnTo>
-                    <a:pt x="1718940" y="1662414"/>
-                  </a:lnTo>
-                  <a:lnTo>
-                    <a:pt x="1647318" y="1628424"/>
-                  </a:lnTo>
-                  <a:lnTo>
-                    <a:pt x="1575695" y="1593800"/>
-                  </a:lnTo>
-                  <a:lnTo>
-                    <a:pt x="1504073" y="1558530"/>
-                  </a:lnTo>
-                  <a:lnTo>
-                    <a:pt x="1432450" y="1522602"/>
-                  </a:lnTo>
-                  <a:lnTo>
-                    <a:pt x="1360827" y="1486003"/>
-                  </a:lnTo>
-                  <a:lnTo>
-                    <a:pt x="1289205" y="1448721"/>
-                  </a:lnTo>
-                  <a:lnTo>
-                    <a:pt x="1217582" y="1410744"/>
-                  </a:lnTo>
-                  <a:lnTo>
-                    <a:pt x="1145960" y="1372058"/>
-                  </a:lnTo>
-                  <a:lnTo>
-                    <a:pt x="1074337" y="1332649"/>
-                  </a:lnTo>
-                  <a:lnTo>
-                    <a:pt x="1002715" y="1292506"/>
-                  </a:lnTo>
-                  <a:lnTo>
-                    <a:pt x="931092" y="1251613"/>
-                  </a:lnTo>
-                  <a:lnTo>
-                    <a:pt x="859470" y="1209957"/>
-                  </a:lnTo>
-                  <a:lnTo>
-                    <a:pt x="787847" y="1167524"/>
-                  </a:lnTo>
-                  <a:lnTo>
-                    <a:pt x="716225" y="1124298"/>
-                  </a:lnTo>
-                  <a:lnTo>
-                    <a:pt x="644602" y="1080267"/>
-                  </a:lnTo>
-                  <a:lnTo>
-                    <a:pt x="572980" y="1035413"/>
-                  </a:lnTo>
-                  <a:lnTo>
-                    <a:pt x="501357" y="989722"/>
-                  </a:lnTo>
-                  <a:lnTo>
-                    <a:pt x="429735" y="943179"/>
-                  </a:lnTo>
-                  <a:lnTo>
-                    <a:pt x="358112" y="895767"/>
-                  </a:lnTo>
-                  <a:lnTo>
-                    <a:pt x="286490" y="847470"/>
-                  </a:lnTo>
-                  <a:lnTo>
-                    <a:pt x="214867" y="798272"/>
-                  </a:lnTo>
-                  <a:lnTo>
-                    <a:pt x="143245" y="748156"/>
-                  </a:lnTo>
-                  <a:lnTo>
-                    <a:pt x="71622" y="697105"/>
-                  </a:lnTo>
-                  <a:lnTo>
-                    <a:pt x="0" y="645100"/>
+                    <a:pt x="2506788" y="45861"/>
+                  </a:lnTo>
+                  <a:lnTo>
+                    <a:pt x="2578410" y="197405"/>
+                  </a:lnTo>
+                  <a:lnTo>
+                    <a:pt x="2650033" y="342269"/>
+                  </a:lnTo>
+                  <a:lnTo>
+                    <a:pt x="2721655" y="480747"/>
+                  </a:lnTo>
+                  <a:lnTo>
+                    <a:pt x="2793278" y="613121"/>
+                  </a:lnTo>
+                  <a:lnTo>
+                    <a:pt x="2864901" y="739660"/>
+                  </a:lnTo>
+                  <a:lnTo>
+                    <a:pt x="2936523" y="860621"/>
+                  </a:lnTo>
+                  <a:lnTo>
+                    <a:pt x="3008146" y="976250"/>
+                  </a:lnTo>
+                  <a:lnTo>
+                    <a:pt x="3079768" y="1086782"/>
+                  </a:lnTo>
+                  <a:lnTo>
+                    <a:pt x="3151391" y="1192442"/>
+                  </a:lnTo>
+                  <a:lnTo>
+                    <a:pt x="3223013" y="1293444"/>
+                  </a:lnTo>
+                  <a:lnTo>
+                    <a:pt x="3294636" y="1389994"/>
+                  </a:lnTo>
+                  <a:lnTo>
+                    <a:pt x="3366258" y="1482288"/>
+                  </a:lnTo>
+                  <a:lnTo>
+                    <a:pt x="3437881" y="1570513"/>
+                  </a:lnTo>
+                  <a:lnTo>
+                    <a:pt x="3509503" y="1654850"/>
+                  </a:lnTo>
+                  <a:lnTo>
+                    <a:pt x="3581126" y="1735468"/>
+                  </a:lnTo>
+                  <a:lnTo>
+                    <a:pt x="3652748" y="1812534"/>
+                  </a:lnTo>
+                  <a:lnTo>
+                    <a:pt x="3724371" y="1886202"/>
+                  </a:lnTo>
+                  <a:lnTo>
+                    <a:pt x="3795993" y="1956622"/>
+                  </a:lnTo>
+                  <a:lnTo>
+                    <a:pt x="3867616" y="2023939"/>
+                  </a:lnTo>
+                  <a:lnTo>
+                    <a:pt x="3939238" y="2088288"/>
+                  </a:lnTo>
+                  <a:lnTo>
+                    <a:pt x="4010861" y="2149801"/>
+                  </a:lnTo>
+                  <a:lnTo>
+                    <a:pt x="4082483" y="2208602"/>
+                  </a:lnTo>
+                  <a:lnTo>
+                    <a:pt x="4154106" y="2264811"/>
+                  </a:lnTo>
+                  <a:lnTo>
+                    <a:pt x="4225729" y="2318542"/>
+                  </a:lnTo>
+                  <a:lnTo>
+                    <a:pt x="4297351" y="2369905"/>
+                  </a:lnTo>
+                  <a:lnTo>
+                    <a:pt x="4368974" y="2419004"/>
+                  </a:lnTo>
+                  <a:lnTo>
+                    <a:pt x="4440596" y="2465939"/>
+                  </a:lnTo>
+                  <a:lnTo>
+                    <a:pt x="4512219" y="2510804"/>
+                  </a:lnTo>
+                  <a:lnTo>
+                    <a:pt x="4583841" y="2553692"/>
+                  </a:lnTo>
+                  <a:lnTo>
+                    <a:pt x="4655464" y="2594689"/>
+                  </a:lnTo>
+                  <a:lnTo>
+                    <a:pt x="4727086" y="2633880"/>
+                  </a:lnTo>
+                  <a:lnTo>
+                    <a:pt x="4798709" y="2661384"/>
+                  </a:lnTo>
+                  <a:lnTo>
+                    <a:pt x="4870331" y="2676581"/>
+                  </a:lnTo>
+                  <a:lnTo>
+                    <a:pt x="4941954" y="2691497"/>
+                  </a:lnTo>
+                  <a:lnTo>
+                    <a:pt x="5013576" y="2706138"/>
+                  </a:lnTo>
+                  <a:lnTo>
+                    <a:pt x="5085199" y="2720508"/>
+                  </a:lnTo>
+                  <a:lnTo>
+                    <a:pt x="5156821" y="2734612"/>
+                  </a:lnTo>
+                  <a:lnTo>
+                    <a:pt x="5228444" y="2748456"/>
+                  </a:lnTo>
+                  <a:lnTo>
+                    <a:pt x="5300066" y="2762044"/>
+                  </a:lnTo>
+                  <a:lnTo>
+                    <a:pt x="5371689" y="2775381"/>
+                  </a:lnTo>
+                  <a:lnTo>
+                    <a:pt x="5443311" y="2788471"/>
+                  </a:lnTo>
+                  <a:lnTo>
+                    <a:pt x="5514934" y="2801320"/>
+                  </a:lnTo>
+                  <a:lnTo>
+                    <a:pt x="5586557" y="2813931"/>
+                  </a:lnTo>
+                  <a:lnTo>
+                    <a:pt x="5658179" y="2826309"/>
+                  </a:lnTo>
+                  <a:lnTo>
+                    <a:pt x="5729802" y="2838458"/>
+                  </a:lnTo>
+                  <a:lnTo>
+                    <a:pt x="5801424" y="2850383"/>
+                  </a:lnTo>
+                  <a:lnTo>
+                    <a:pt x="5873047" y="2862087"/>
+                  </a:lnTo>
+                  <a:lnTo>
+                    <a:pt x="5944669" y="2873575"/>
+                  </a:lnTo>
+                  <a:lnTo>
+                    <a:pt x="6016292" y="2884851"/>
+                  </a:lnTo>
+                  <a:lnTo>
+                    <a:pt x="6087914" y="2895918"/>
+                  </a:lnTo>
+                  <a:lnTo>
+                    <a:pt x="6159537" y="2906781"/>
+                  </a:lnTo>
+                  <a:lnTo>
+                    <a:pt x="6231159" y="2917443"/>
+                  </a:lnTo>
+                  <a:lnTo>
+                    <a:pt x="6302782" y="2927908"/>
+                  </a:lnTo>
+                  <a:lnTo>
+                    <a:pt x="6374404" y="2938180"/>
+                  </a:lnTo>
+                  <a:lnTo>
+                    <a:pt x="6446027" y="2948262"/>
+                  </a:lnTo>
+                  <a:lnTo>
+                    <a:pt x="6517649" y="2958158"/>
+                  </a:lnTo>
+                  <a:lnTo>
+                    <a:pt x="6589272" y="2967870"/>
+                  </a:lnTo>
+                  <a:lnTo>
+                    <a:pt x="6660894" y="2977404"/>
+                  </a:lnTo>
+                  <a:lnTo>
+                    <a:pt x="6732517" y="2986761"/>
+                  </a:lnTo>
+                  <a:lnTo>
+                    <a:pt x="6804139" y="2995945"/>
+                  </a:lnTo>
+                  <a:lnTo>
+                    <a:pt x="6875762" y="3004959"/>
+                  </a:lnTo>
+                  <a:lnTo>
+                    <a:pt x="6947385" y="3013807"/>
+                  </a:lnTo>
+                  <a:lnTo>
+                    <a:pt x="7019007" y="3022491"/>
+                  </a:lnTo>
+                  <a:lnTo>
+                    <a:pt x="7090630" y="3031015"/>
+                  </a:lnTo>
+                  <a:lnTo>
+                    <a:pt x="7090630" y="3291768"/>
+                  </a:lnTo>
+                  <a:lnTo>
+                    <a:pt x="7019007" y="3282915"/>
+                  </a:lnTo>
+                  <a:lnTo>
+                    <a:pt x="6947385" y="3273654"/>
+                  </a:lnTo>
+                  <a:lnTo>
+                    <a:pt x="6875762" y="3263966"/>
+                  </a:lnTo>
+                  <a:lnTo>
+                    <a:pt x="6804139" y="3253831"/>
+                  </a:lnTo>
+                  <a:lnTo>
+                    <a:pt x="6732517" y="3243229"/>
+                  </a:lnTo>
+                  <a:lnTo>
+                    <a:pt x="6660894" y="3232138"/>
+                  </a:lnTo>
+                  <a:lnTo>
+                    <a:pt x="6589272" y="3220535"/>
+                  </a:lnTo>
+                  <a:lnTo>
+                    <a:pt x="6517649" y="3208398"/>
+                  </a:lnTo>
+                  <a:lnTo>
+                    <a:pt x="6446027" y="3195701"/>
+                  </a:lnTo>
+                  <a:lnTo>
+                    <a:pt x="6374404" y="3182418"/>
+                  </a:lnTo>
+                  <a:lnTo>
+                    <a:pt x="6302782" y="3168523"/>
+                  </a:lnTo>
+                  <a:lnTo>
+                    <a:pt x="6231159" y="3153987"/>
+                  </a:lnTo>
+                  <a:lnTo>
+                    <a:pt x="6159537" y="3138780"/>
+                  </a:lnTo>
+                  <a:lnTo>
+                    <a:pt x="6087914" y="3122873"/>
+                  </a:lnTo>
+                  <a:lnTo>
+                    <a:pt x="6016292" y="3106232"/>
+                  </a:lnTo>
+                  <a:lnTo>
+                    <a:pt x="5944669" y="3088823"/>
+                  </a:lnTo>
+                  <a:lnTo>
+                    <a:pt x="5873047" y="3070612"/>
+                  </a:lnTo>
+                  <a:lnTo>
+                    <a:pt x="5801424" y="3051561"/>
+                  </a:lnTo>
+                  <a:lnTo>
+                    <a:pt x="5729802" y="3031632"/>
+                  </a:lnTo>
+                  <a:lnTo>
+                    <a:pt x="5658179" y="3010783"/>
+                  </a:lnTo>
+                  <a:lnTo>
+                    <a:pt x="5586557" y="2988973"/>
+                  </a:lnTo>
+                  <a:lnTo>
+                    <a:pt x="5514934" y="2966158"/>
+                  </a:lnTo>
+                  <a:lnTo>
+                    <a:pt x="5443311" y="2942290"/>
+                  </a:lnTo>
+                  <a:lnTo>
+                    <a:pt x="5371689" y="2917321"/>
+                  </a:lnTo>
+                  <a:lnTo>
+                    <a:pt x="5300066" y="2891202"/>
+                  </a:lnTo>
+                  <a:lnTo>
+                    <a:pt x="5228444" y="2863878"/>
+                  </a:lnTo>
+                  <a:lnTo>
+                    <a:pt x="5156821" y="2835293"/>
+                  </a:lnTo>
+                  <a:lnTo>
+                    <a:pt x="5085199" y="2805391"/>
+                  </a:lnTo>
+                  <a:lnTo>
+                    <a:pt x="5013576" y="2774110"/>
+                  </a:lnTo>
+                  <a:lnTo>
+                    <a:pt x="4941954" y="2741386"/>
+                  </a:lnTo>
+                  <a:lnTo>
+                    <a:pt x="4870331" y="2707153"/>
+                  </a:lnTo>
+                  <a:lnTo>
+                    <a:pt x="4798709" y="2671342"/>
+                  </a:lnTo>
+                  <a:lnTo>
+                    <a:pt x="4727086" y="2645901"/>
+                  </a:lnTo>
+                  <a:lnTo>
+                    <a:pt x="4655464" y="2630126"/>
+                  </a:lnTo>
+                  <a:lnTo>
+                    <a:pt x="4583841" y="2614055"/>
+                  </a:lnTo>
+                  <a:lnTo>
+                    <a:pt x="4512219" y="2597681"/>
+                  </a:lnTo>
+                  <a:lnTo>
+                    <a:pt x="4440596" y="2580998"/>
+                  </a:lnTo>
+                  <a:lnTo>
+                    <a:pt x="4368974" y="2564001"/>
+                  </a:lnTo>
+                  <a:lnTo>
+                    <a:pt x="4297351" y="2546685"/>
+                  </a:lnTo>
+                  <a:lnTo>
+                    <a:pt x="4225729" y="2529042"/>
+                  </a:lnTo>
+                  <a:lnTo>
+                    <a:pt x="4154106" y="2511067"/>
+                  </a:lnTo>
+                  <a:lnTo>
+                    <a:pt x="4082483" y="2492754"/>
+                  </a:lnTo>
+                  <a:lnTo>
+                    <a:pt x="4010861" y="2474096"/>
+                  </a:lnTo>
+                  <a:lnTo>
+                    <a:pt x="3939238" y="2455087"/>
+                  </a:lnTo>
+                  <a:lnTo>
+                    <a:pt x="3867616" y="2435720"/>
+                  </a:lnTo>
+                  <a:lnTo>
+                    <a:pt x="3795993" y="2415988"/>
+                  </a:lnTo>
+                  <a:lnTo>
+                    <a:pt x="3724371" y="2395884"/>
+                  </a:lnTo>
+                  <a:lnTo>
+                    <a:pt x="3652748" y="2375403"/>
+                  </a:lnTo>
+                  <a:lnTo>
+                    <a:pt x="3581126" y="2354535"/>
+                  </a:lnTo>
+                  <a:lnTo>
+                    <a:pt x="3509503" y="2333275"/>
+                  </a:lnTo>
+                  <a:lnTo>
+                    <a:pt x="3437881" y="2311614"/>
+                  </a:lnTo>
+                  <a:lnTo>
+                    <a:pt x="3366258" y="2289546"/>
+                  </a:lnTo>
+                  <a:lnTo>
+                    <a:pt x="3294636" y="2267062"/>
+                  </a:lnTo>
+                  <a:lnTo>
+                    <a:pt x="3223013" y="2244154"/>
+                  </a:lnTo>
+                  <a:lnTo>
+                    <a:pt x="3151391" y="2220816"/>
+                  </a:lnTo>
+                  <a:lnTo>
+                    <a:pt x="3079768" y="2197038"/>
+                  </a:lnTo>
+                  <a:lnTo>
+                    <a:pt x="3008146" y="2172812"/>
+                  </a:lnTo>
+                  <a:lnTo>
+                    <a:pt x="2936523" y="2148130"/>
+                  </a:lnTo>
+                  <a:lnTo>
+                    <a:pt x="2864901" y="2122984"/>
+                  </a:lnTo>
+                  <a:lnTo>
+                    <a:pt x="2793278" y="2097364"/>
+                  </a:lnTo>
+                  <a:lnTo>
+                    <a:pt x="2721655" y="2071262"/>
+                  </a:lnTo>
+                  <a:lnTo>
+                    <a:pt x="2650033" y="2044668"/>
+                  </a:lnTo>
+                  <a:lnTo>
+                    <a:pt x="2578410" y="2017573"/>
+                  </a:lnTo>
+                  <a:lnTo>
+                    <a:pt x="2506788" y="1989969"/>
+                  </a:lnTo>
+                  <a:lnTo>
+                    <a:pt x="2435165" y="1961845"/>
+                  </a:lnTo>
+                  <a:lnTo>
+                    <a:pt x="2363543" y="1933191"/>
+                  </a:lnTo>
+                  <a:lnTo>
+                    <a:pt x="2291920" y="1903998"/>
+                  </a:lnTo>
+                  <a:lnTo>
+                    <a:pt x="2220298" y="1874255"/>
+                  </a:lnTo>
+                  <a:lnTo>
+                    <a:pt x="2148675" y="1843952"/>
+                  </a:lnTo>
+                  <a:lnTo>
+                    <a:pt x="2077053" y="1813078"/>
+                  </a:lnTo>
+                  <a:lnTo>
+                    <a:pt x="2005430" y="1781624"/>
+                  </a:lnTo>
+                  <a:lnTo>
+                    <a:pt x="1933808" y="1749577"/>
+                  </a:lnTo>
+                  <a:lnTo>
+                    <a:pt x="1862185" y="1716926"/>
+                  </a:lnTo>
+                  <a:lnTo>
+                    <a:pt x="1790563" y="1683661"/>
+                  </a:lnTo>
+                  <a:lnTo>
+                    <a:pt x="1718940" y="1649770"/>
+                  </a:lnTo>
+                  <a:lnTo>
+                    <a:pt x="1647318" y="1615241"/>
+                  </a:lnTo>
+                  <a:lnTo>
+                    <a:pt x="1575695" y="1580061"/>
+                  </a:lnTo>
+                  <a:lnTo>
+                    <a:pt x="1504073" y="1544219"/>
+                  </a:lnTo>
+                  <a:lnTo>
+                    <a:pt x="1432450" y="1507702"/>
+                  </a:lnTo>
+                  <a:lnTo>
+                    <a:pt x="1360827" y="1470498"/>
+                  </a:lnTo>
+                  <a:lnTo>
+                    <a:pt x="1289205" y="1432594"/>
+                  </a:lnTo>
+                  <a:lnTo>
+                    <a:pt x="1217582" y="1393975"/>
+                  </a:lnTo>
+                  <a:lnTo>
+                    <a:pt x="1145960" y="1354630"/>
+                  </a:lnTo>
+                  <a:lnTo>
+                    <a:pt x="1074337" y="1314544"/>
+                  </a:lnTo>
+                  <a:lnTo>
+                    <a:pt x="1002715" y="1273703"/>
+                  </a:lnTo>
+                  <a:lnTo>
+                    <a:pt x="931092" y="1232093"/>
+                  </a:lnTo>
+                  <a:lnTo>
+                    <a:pt x="859470" y="1189700"/>
+                  </a:lnTo>
+                  <a:lnTo>
+                    <a:pt x="787847" y="1146508"/>
+                  </a:lnTo>
+                  <a:lnTo>
+                    <a:pt x="716225" y="1102503"/>
+                  </a:lnTo>
+                  <a:lnTo>
+                    <a:pt x="644602" y="1057670"/>
+                  </a:lnTo>
+                  <a:lnTo>
+                    <a:pt x="572980" y="1011993"/>
+                  </a:lnTo>
+                  <a:lnTo>
+                    <a:pt x="501357" y="965456"/>
+                  </a:lnTo>
+                  <a:lnTo>
+                    <a:pt x="429735" y="918042"/>
+                  </a:lnTo>
+                  <a:lnTo>
+                    <a:pt x="358112" y="869736"/>
+                  </a:lnTo>
+                  <a:lnTo>
+                    <a:pt x="286490" y="820521"/>
+                  </a:lnTo>
+                  <a:lnTo>
+                    <a:pt x="214867" y="770378"/>
+                  </a:lnTo>
+                  <a:lnTo>
+                    <a:pt x="143245" y="719292"/>
+                  </a:lnTo>
+                  <a:lnTo>
+                    <a:pt x="71622" y="667244"/>
+                  </a:lnTo>
+                  <a:lnTo>
+                    <a:pt x="0" y="614216"/>
                   </a:lnTo>
                   <a:close/>
                 </a:path>
@@ -3574,210 +3574,210 @@
           </p:nvSpPr>
           <p:spPr>
             <a:xfrm>
-              <a:off x="3652242" y="2073503"/>
-              <a:ext cx="4610437" cy="3028619"/>
+              <a:off x="3658118" y="2073503"/>
+              <a:ext cx="4604561" cy="3031015"/>
             </a:xfrm>
             <a:custGeom>
               <a:avLst/>
               <a:pathLst>
-                <a:path w="4610437" h="3028619">
+                <a:path w="4604561" h="3031015">
                   <a:moveTo>
                     <a:pt x="0" y="0"/>
                   </a:moveTo>
                   <a:lnTo>
-                    <a:pt x="26595" y="58496"/>
-                  </a:lnTo>
-                  <a:lnTo>
-                    <a:pt x="98218" y="209101"/>
-                  </a:lnTo>
-                  <a:lnTo>
-                    <a:pt x="169840" y="353084"/>
-                  </a:lnTo>
-                  <a:lnTo>
-                    <a:pt x="241463" y="490736"/>
-                  </a:lnTo>
-                  <a:lnTo>
-                    <a:pt x="313085" y="622335"/>
-                  </a:lnTo>
-                  <a:lnTo>
-                    <a:pt x="384708" y="748149"/>
-                  </a:lnTo>
-                  <a:lnTo>
-                    <a:pt x="456330" y="868430"/>
-                  </a:lnTo>
-                  <a:lnTo>
-                    <a:pt x="527953" y="983423"/>
-                  </a:lnTo>
-                  <a:lnTo>
-                    <a:pt x="599575" y="1093360"/>
-                  </a:lnTo>
-                  <a:lnTo>
-                    <a:pt x="671198" y="1198463"/>
-                  </a:lnTo>
-                  <a:lnTo>
-                    <a:pt x="742820" y="1298944"/>
-                  </a:lnTo>
-                  <a:lnTo>
-                    <a:pt x="814443" y="1395008"/>
-                  </a:lnTo>
-                  <a:lnTo>
-                    <a:pt x="886065" y="1486848"/>
-                  </a:lnTo>
-                  <a:lnTo>
-                    <a:pt x="957688" y="1574649"/>
-                  </a:lnTo>
-                  <a:lnTo>
-                    <a:pt x="1029311" y="1658590"/>
-                  </a:lnTo>
-                  <a:lnTo>
-                    <a:pt x="1100933" y="1738841"/>
-                  </a:lnTo>
-                  <a:lnTo>
-                    <a:pt x="1172556" y="1815562"/>
-                  </a:lnTo>
-                  <a:lnTo>
-                    <a:pt x="1244178" y="1888911"/>
-                  </a:lnTo>
-                  <a:lnTo>
-                    <a:pt x="1315801" y="1959034"/>
-                  </a:lnTo>
-                  <a:lnTo>
-                    <a:pt x="1387423" y="2026074"/>
-                  </a:lnTo>
-                  <a:lnTo>
-                    <a:pt x="1459046" y="2090167"/>
-                  </a:lnTo>
-                  <a:lnTo>
-                    <a:pt x="1530668" y="2151441"/>
-                  </a:lnTo>
-                  <a:lnTo>
-                    <a:pt x="1602291" y="2210021"/>
-                  </a:lnTo>
-                  <a:lnTo>
-                    <a:pt x="1673913" y="2266025"/>
-                  </a:lnTo>
-                  <a:lnTo>
-                    <a:pt x="1745536" y="2319567"/>
-                  </a:lnTo>
-                  <a:lnTo>
-                    <a:pt x="1817158" y="2370755"/>
-                  </a:lnTo>
-                  <a:lnTo>
-                    <a:pt x="1888781" y="2419692"/>
-                  </a:lnTo>
-                  <a:lnTo>
-                    <a:pt x="1960403" y="2466478"/>
-                  </a:lnTo>
-                  <a:lnTo>
-                    <a:pt x="2032026" y="2511206"/>
-                  </a:lnTo>
-                  <a:lnTo>
-                    <a:pt x="2103648" y="2553968"/>
-                  </a:lnTo>
-                  <a:lnTo>
-                    <a:pt x="2175271" y="2594849"/>
-                  </a:lnTo>
-                  <a:lnTo>
-                    <a:pt x="2246893" y="2633933"/>
-                  </a:lnTo>
-                  <a:lnTo>
-                    <a:pt x="2318516" y="2661323"/>
-                  </a:lnTo>
-                  <a:lnTo>
-                    <a:pt x="2390139" y="2676389"/>
-                  </a:lnTo>
-                  <a:lnTo>
-                    <a:pt x="2461761" y="2691180"/>
-                  </a:lnTo>
-                  <a:lnTo>
-                    <a:pt x="2533384" y="2705700"/>
-                  </a:lnTo>
-                  <a:lnTo>
-                    <a:pt x="2605006" y="2719954"/>
-                  </a:lnTo>
-                  <a:lnTo>
-                    <a:pt x="2676629" y="2733947"/>
-                  </a:lnTo>
-                  <a:lnTo>
-                    <a:pt x="2748251" y="2747683"/>
-                  </a:lnTo>
-                  <a:lnTo>
-                    <a:pt x="2819874" y="2761168"/>
-                  </a:lnTo>
-                  <a:lnTo>
-                    <a:pt x="2891496" y="2774405"/>
-                  </a:lnTo>
-                  <a:lnTo>
-                    <a:pt x="2963119" y="2787401"/>
-                  </a:lnTo>
-                  <a:lnTo>
-                    <a:pt x="3034741" y="2800158"/>
-                  </a:lnTo>
-                  <a:lnTo>
-                    <a:pt x="3106364" y="2812681"/>
-                  </a:lnTo>
-                  <a:lnTo>
-                    <a:pt x="3177986" y="2824975"/>
-                  </a:lnTo>
-                  <a:lnTo>
-                    <a:pt x="3249609" y="2837044"/>
-                  </a:lnTo>
-                  <a:lnTo>
-                    <a:pt x="3321231" y="2848891"/>
-                  </a:lnTo>
-                  <a:lnTo>
-                    <a:pt x="3392854" y="2860522"/>
-                  </a:lnTo>
-                  <a:lnTo>
-                    <a:pt x="3464476" y="2871939"/>
-                  </a:lnTo>
-                  <a:lnTo>
-                    <a:pt x="3536099" y="2883148"/>
-                  </a:lnTo>
-                  <a:lnTo>
-                    <a:pt x="3607721" y="2894151"/>
-                  </a:lnTo>
-                  <a:lnTo>
-                    <a:pt x="3679344" y="2904952"/>
-                  </a:lnTo>
-                  <a:lnTo>
-                    <a:pt x="3750967" y="2915556"/>
-                  </a:lnTo>
-                  <a:lnTo>
-                    <a:pt x="3822589" y="2925965"/>
-                  </a:lnTo>
-                  <a:lnTo>
-                    <a:pt x="3894212" y="2936184"/>
-                  </a:lnTo>
-                  <a:lnTo>
-                    <a:pt x="3965834" y="2946215"/>
-                  </a:lnTo>
-                  <a:lnTo>
-                    <a:pt x="4037457" y="2956063"/>
-                  </a:lnTo>
-                  <a:lnTo>
-                    <a:pt x="4109079" y="2965730"/>
-                  </a:lnTo>
-                  <a:lnTo>
-                    <a:pt x="4180702" y="2975220"/>
-                  </a:lnTo>
-                  <a:lnTo>
-                    <a:pt x="4252324" y="2984536"/>
-                  </a:lnTo>
-                  <a:lnTo>
-                    <a:pt x="4323947" y="2993682"/>
-                  </a:lnTo>
-                  <a:lnTo>
-                    <a:pt x="4395569" y="3002660"/>
-                  </a:lnTo>
-                  <a:lnTo>
-                    <a:pt x="4467192" y="3011473"/>
-                  </a:lnTo>
-                  <a:lnTo>
-                    <a:pt x="4538814" y="3020125"/>
-                  </a:lnTo>
-                  <a:lnTo>
-                    <a:pt x="4610437" y="3028619"/>
+                    <a:pt x="20719" y="45861"/>
+                  </a:lnTo>
+                  <a:lnTo>
+                    <a:pt x="92342" y="197405"/>
+                  </a:lnTo>
+                  <a:lnTo>
+                    <a:pt x="163964" y="342269"/>
+                  </a:lnTo>
+                  <a:lnTo>
+                    <a:pt x="235587" y="480747"/>
+                  </a:lnTo>
+                  <a:lnTo>
+                    <a:pt x="307209" y="613121"/>
+                  </a:lnTo>
+                  <a:lnTo>
+                    <a:pt x="378832" y="739660"/>
+                  </a:lnTo>
+                  <a:lnTo>
+                    <a:pt x="450454" y="860621"/>
+                  </a:lnTo>
+                  <a:lnTo>
+                    <a:pt x="522077" y="976250"/>
+                  </a:lnTo>
+                  <a:lnTo>
+                    <a:pt x="593699" y="1086782"/>
+                  </a:lnTo>
+                  <a:lnTo>
+                    <a:pt x="665322" y="1192442"/>
+                  </a:lnTo>
+                  <a:lnTo>
+                    <a:pt x="736944" y="1293444"/>
+                  </a:lnTo>
+                  <a:lnTo>
+                    <a:pt x="808567" y="1389994"/>
+                  </a:lnTo>
+                  <a:lnTo>
+                    <a:pt x="880189" y="1482288"/>
+                  </a:lnTo>
+                  <a:lnTo>
+                    <a:pt x="951812" y="1570513"/>
+                  </a:lnTo>
+                  <a:lnTo>
+                    <a:pt x="1023434" y="1654850"/>
+                  </a:lnTo>
+                  <a:lnTo>
+                    <a:pt x="1095057" y="1735468"/>
+                  </a:lnTo>
+                  <a:lnTo>
+                    <a:pt x="1166680" y="1812534"/>
+                  </a:lnTo>
+                  <a:lnTo>
+                    <a:pt x="1238302" y="1886202"/>
+                  </a:lnTo>
+                  <a:lnTo>
+                    <a:pt x="1309925" y="1956622"/>
+                  </a:lnTo>
+                  <a:lnTo>
+                    <a:pt x="1381547" y="2023939"/>
+                  </a:lnTo>
+                  <a:lnTo>
+                    <a:pt x="1453170" y="2088288"/>
+                  </a:lnTo>
+                  <a:lnTo>
+                    <a:pt x="1524792" y="2149801"/>
+                  </a:lnTo>
+                  <a:lnTo>
+                    <a:pt x="1596415" y="2208602"/>
+                  </a:lnTo>
+                  <a:lnTo>
+                    <a:pt x="1668037" y="2264811"/>
+                  </a:lnTo>
+                  <a:lnTo>
+                    <a:pt x="1739660" y="2318542"/>
+                  </a:lnTo>
+                  <a:lnTo>
+                    <a:pt x="1811282" y="2369905"/>
+                  </a:lnTo>
+                  <a:lnTo>
+                    <a:pt x="1882905" y="2419004"/>
+                  </a:lnTo>
+                  <a:lnTo>
+                    <a:pt x="1954527" y="2465939"/>
+                  </a:lnTo>
+                  <a:lnTo>
+                    <a:pt x="2026150" y="2510804"/>
+                  </a:lnTo>
+                  <a:lnTo>
+                    <a:pt x="2097772" y="2553692"/>
+                  </a:lnTo>
+                  <a:lnTo>
+                    <a:pt x="2169395" y="2594689"/>
+                  </a:lnTo>
+                  <a:lnTo>
+                    <a:pt x="2241017" y="2633880"/>
+                  </a:lnTo>
+                  <a:lnTo>
+                    <a:pt x="2312640" y="2661384"/>
+                  </a:lnTo>
+                  <a:lnTo>
+                    <a:pt x="2384262" y="2676581"/>
+                  </a:lnTo>
+                  <a:lnTo>
+                    <a:pt x="2455885" y="2691497"/>
+                  </a:lnTo>
+                  <a:lnTo>
+                    <a:pt x="2527508" y="2706138"/>
+                  </a:lnTo>
+                  <a:lnTo>
+                    <a:pt x="2599130" y="2720508"/>
+                  </a:lnTo>
+                  <a:lnTo>
+                    <a:pt x="2670753" y="2734612"/>
+                  </a:lnTo>
+                  <a:lnTo>
+                    <a:pt x="2742375" y="2748456"/>
+                  </a:lnTo>
+                  <a:lnTo>
+                    <a:pt x="2813998" y="2762044"/>
+                  </a:lnTo>
+                  <a:lnTo>
+                    <a:pt x="2885620" y="2775381"/>
+                  </a:lnTo>
+                  <a:lnTo>
+                    <a:pt x="2957243" y="2788471"/>
+                  </a:lnTo>
+                  <a:lnTo>
+                    <a:pt x="3028865" y="2801320"/>
+                  </a:lnTo>
+                  <a:lnTo>
+                    <a:pt x="3100488" y="2813931"/>
+                  </a:lnTo>
+                  <a:lnTo>
+                    <a:pt x="3172110" y="2826309"/>
+                  </a:lnTo>
+                  <a:lnTo>
+                    <a:pt x="3243733" y="2838458"/>
+                  </a:lnTo>
+                  <a:lnTo>
+                    <a:pt x="3315355" y="2850383"/>
+                  </a:lnTo>
+                  <a:lnTo>
+                    <a:pt x="3386978" y="2862087"/>
+                  </a:lnTo>
+                  <a:lnTo>
+                    <a:pt x="3458600" y="2873575"/>
+                  </a:lnTo>
+                  <a:lnTo>
+                    <a:pt x="3530223" y="2884851"/>
+                  </a:lnTo>
+                  <a:lnTo>
+                    <a:pt x="3601845" y="2895918"/>
+                  </a:lnTo>
+                  <a:lnTo>
+                    <a:pt x="3673468" y="2906781"/>
+                  </a:lnTo>
+                  <a:lnTo>
+                    <a:pt x="3745090" y="2917443"/>
+                  </a:lnTo>
+                  <a:lnTo>
+                    <a:pt x="3816713" y="2927908"/>
+                  </a:lnTo>
+                  <a:lnTo>
+                    <a:pt x="3888336" y="2938180"/>
+                  </a:lnTo>
+                  <a:lnTo>
+                    <a:pt x="3959958" y="2948262"/>
+                  </a:lnTo>
+                  <a:lnTo>
+                    <a:pt x="4031581" y="2958158"/>
+                  </a:lnTo>
+                  <a:lnTo>
+                    <a:pt x="4103203" y="2967870"/>
+                  </a:lnTo>
+                  <a:lnTo>
+                    <a:pt x="4174826" y="2977404"/>
+                  </a:lnTo>
+                  <a:lnTo>
+                    <a:pt x="4246448" y="2986761"/>
+                  </a:lnTo>
+                  <a:lnTo>
+                    <a:pt x="4318071" y="2995945"/>
+                  </a:lnTo>
+                  <a:lnTo>
+                    <a:pt x="4389693" y="3004959"/>
+                  </a:lnTo>
+                  <a:lnTo>
+                    <a:pt x="4461316" y="3013807"/>
+                  </a:lnTo>
+                  <a:lnTo>
+                    <a:pt x="4532938" y="3022491"/>
+                  </a:lnTo>
+                  <a:lnTo>
+                    <a:pt x="4604561" y="3031015"/>
                   </a:lnTo>
                 </a:path>
               </a:pathLst>
@@ -3797,309 +3797,309 @@
           </p:nvSpPr>
           <p:spPr>
             <a:xfrm>
-              <a:off x="1172049" y="2718603"/>
-              <a:ext cx="7090630" cy="2645938"/>
+              <a:off x="1172049" y="2687719"/>
+              <a:ext cx="7090630" cy="2677551"/>
             </a:xfrm>
             <a:custGeom>
               <a:avLst/>
               <a:pathLst>
-                <a:path w="7090630" h="2645938">
+                <a:path w="7090630" h="2677551">
                   <a:moveTo>
-                    <a:pt x="7090630" y="2645938"/>
+                    <a:pt x="7090630" y="2677551"/>
                   </a:moveTo>
                   <a:lnTo>
-                    <a:pt x="7019007" y="2637075"/>
-                  </a:lnTo>
-                  <a:lnTo>
-                    <a:pt x="6947385" y="2627805"/>
-                  </a:lnTo>
-                  <a:lnTo>
-                    <a:pt x="6875762" y="2618108"/>
-                  </a:lnTo>
-                  <a:lnTo>
-                    <a:pt x="6804139" y="2607965"/>
-                  </a:lnTo>
-                  <a:lnTo>
-                    <a:pt x="6732517" y="2597356"/>
-                  </a:lnTo>
-                  <a:lnTo>
-                    <a:pt x="6660894" y="2586259"/>
-                  </a:lnTo>
-                  <a:lnTo>
-                    <a:pt x="6589272" y="2574651"/>
-                  </a:lnTo>
-                  <a:lnTo>
-                    <a:pt x="6517649" y="2562510"/>
-                  </a:lnTo>
-                  <a:lnTo>
-                    <a:pt x="6446027" y="2549810"/>
-                  </a:lnTo>
-                  <a:lnTo>
-                    <a:pt x="6374404" y="2536526"/>
-                  </a:lnTo>
-                  <a:lnTo>
-                    <a:pt x="6302782" y="2522631"/>
-                  </a:lnTo>
-                  <a:lnTo>
-                    <a:pt x="6231159" y="2508097"/>
-                  </a:lnTo>
-                  <a:lnTo>
-                    <a:pt x="6159537" y="2492895"/>
-                  </a:lnTo>
-                  <a:lnTo>
-                    <a:pt x="6087914" y="2476993"/>
-                  </a:lnTo>
-                  <a:lnTo>
-                    <a:pt x="6016292" y="2460360"/>
-                  </a:lnTo>
-                  <a:lnTo>
-                    <a:pt x="5944669" y="2442963"/>
-                  </a:lnTo>
-                  <a:lnTo>
-                    <a:pt x="5873047" y="2424765"/>
-                  </a:lnTo>
-                  <a:lnTo>
-                    <a:pt x="5801424" y="2405730"/>
-                  </a:lnTo>
-                  <a:lnTo>
-                    <a:pt x="5729802" y="2385820"/>
-                  </a:lnTo>
-                  <a:lnTo>
-                    <a:pt x="5658179" y="2364994"/>
-                  </a:lnTo>
-                  <a:lnTo>
-                    <a:pt x="5586557" y="2343210"/>
-                  </a:lnTo>
-                  <a:lnTo>
-                    <a:pt x="5514934" y="2320424"/>
-                  </a:lnTo>
-                  <a:lnTo>
-                    <a:pt x="5443311" y="2296591"/>
-                  </a:lnTo>
-                  <a:lnTo>
-                    <a:pt x="5371689" y="2271661"/>
-                  </a:lnTo>
-                  <a:lnTo>
-                    <a:pt x="5300066" y="2245584"/>
-                  </a:lnTo>
-                  <a:lnTo>
-                    <a:pt x="5228444" y="2218309"/>
-                  </a:lnTo>
-                  <a:lnTo>
-                    <a:pt x="5156821" y="2189779"/>
-                  </a:lnTo>
-                  <a:lnTo>
-                    <a:pt x="5085199" y="2159937"/>
-                  </a:lnTo>
-                  <a:lnTo>
-                    <a:pt x="5013576" y="2128722"/>
-                  </a:lnTo>
-                  <a:lnTo>
-                    <a:pt x="4941954" y="2096072"/>
-                  </a:lnTo>
-                  <a:lnTo>
-                    <a:pt x="4870331" y="2061920"/>
-                  </a:lnTo>
-                  <a:lnTo>
-                    <a:pt x="4798709" y="2026198"/>
-                  </a:lnTo>
-                  <a:lnTo>
-                    <a:pt x="4727086" y="2000874"/>
-                  </a:lnTo>
-                  <a:lnTo>
-                    <a:pt x="4655464" y="1985239"/>
-                  </a:lnTo>
-                  <a:lnTo>
-                    <a:pt x="4583841" y="1969313"/>
-                  </a:lnTo>
-                  <a:lnTo>
-                    <a:pt x="4512219" y="1953089"/>
-                  </a:lnTo>
-                  <a:lnTo>
-                    <a:pt x="4440596" y="1936563"/>
-                  </a:lnTo>
-                  <a:lnTo>
-                    <a:pt x="4368974" y="1919729"/>
-                  </a:lnTo>
-                  <a:lnTo>
-                    <a:pt x="4297351" y="1902580"/>
-                  </a:lnTo>
-                  <a:lnTo>
-                    <a:pt x="4225729" y="1885111"/>
-                  </a:lnTo>
-                  <a:lnTo>
-                    <a:pt x="4154106" y="1867316"/>
-                  </a:lnTo>
-                  <a:lnTo>
-                    <a:pt x="4082483" y="1849189"/>
-                  </a:lnTo>
-                  <a:lnTo>
-                    <a:pt x="4010861" y="1830724"/>
-                  </a:lnTo>
-                  <a:lnTo>
-                    <a:pt x="3939238" y="1811914"/>
-                  </a:lnTo>
-                  <a:lnTo>
-                    <a:pt x="3867616" y="1792754"/>
-                  </a:lnTo>
-                  <a:lnTo>
-                    <a:pt x="3795993" y="1773235"/>
-                  </a:lnTo>
-                  <a:lnTo>
-                    <a:pt x="3724371" y="1753353"/>
-                  </a:lnTo>
-                  <a:lnTo>
-                    <a:pt x="3652748" y="1733099"/>
-                  </a:lnTo>
-                  <a:lnTo>
-                    <a:pt x="3581126" y="1712467"/>
-                  </a:lnTo>
-                  <a:lnTo>
-                    <a:pt x="3509503" y="1691451"/>
-                  </a:lnTo>
-                  <a:lnTo>
-                    <a:pt x="3437881" y="1670042"/>
-                  </a:lnTo>
-                  <a:lnTo>
-                    <a:pt x="3366258" y="1648233"/>
-                  </a:lnTo>
-                  <a:lnTo>
-                    <a:pt x="3294636" y="1626018"/>
-                  </a:lnTo>
-                  <a:lnTo>
-                    <a:pt x="3223013" y="1603388"/>
-                  </a:lnTo>
-                  <a:lnTo>
-                    <a:pt x="3151391" y="1580336"/>
-                  </a:lnTo>
-                  <a:lnTo>
-                    <a:pt x="3079768" y="1556853"/>
-                  </a:lnTo>
-                  <a:lnTo>
-                    <a:pt x="3008146" y="1532932"/>
-                  </a:lnTo>
-                  <a:lnTo>
-                    <a:pt x="2936523" y="1508565"/>
-                  </a:lnTo>
-                  <a:lnTo>
-                    <a:pt x="2864901" y="1483743"/>
-                  </a:lnTo>
-                  <a:lnTo>
-                    <a:pt x="2793278" y="1458458"/>
-                  </a:lnTo>
-                  <a:lnTo>
-                    <a:pt x="2721655" y="1432701"/>
-                  </a:lnTo>
-                  <a:lnTo>
-                    <a:pt x="2650033" y="1406464"/>
-                  </a:lnTo>
-                  <a:lnTo>
-                    <a:pt x="2578410" y="1379736"/>
-                  </a:lnTo>
-                  <a:lnTo>
-                    <a:pt x="2506788" y="1352510"/>
-                  </a:lnTo>
-                  <a:lnTo>
-                    <a:pt x="2435165" y="1324776"/>
-                  </a:lnTo>
-                  <a:lnTo>
-                    <a:pt x="2363543" y="1296524"/>
-                  </a:lnTo>
-                  <a:lnTo>
-                    <a:pt x="2291920" y="1267745"/>
-                  </a:lnTo>
-                  <a:lnTo>
-                    <a:pt x="2220298" y="1238429"/>
-                  </a:lnTo>
-                  <a:lnTo>
-                    <a:pt x="2148675" y="1208566"/>
-                  </a:lnTo>
-                  <a:lnTo>
-                    <a:pt x="2077053" y="1178146"/>
-                  </a:lnTo>
-                  <a:lnTo>
-                    <a:pt x="2005430" y="1147157"/>
-                  </a:lnTo>
-                  <a:lnTo>
-                    <a:pt x="1933808" y="1115591"/>
-                  </a:lnTo>
-                  <a:lnTo>
-                    <a:pt x="1862185" y="1083435"/>
-                  </a:lnTo>
-                  <a:lnTo>
-                    <a:pt x="1790563" y="1050680"/>
-                  </a:lnTo>
-                  <a:lnTo>
-                    <a:pt x="1718940" y="1017313"/>
-                  </a:lnTo>
-                  <a:lnTo>
-                    <a:pt x="1647318" y="983323"/>
-                  </a:lnTo>
-                  <a:lnTo>
-                    <a:pt x="1575695" y="948699"/>
-                  </a:lnTo>
-                  <a:lnTo>
-                    <a:pt x="1504073" y="913429"/>
-                  </a:lnTo>
-                  <a:lnTo>
-                    <a:pt x="1432450" y="877501"/>
-                  </a:lnTo>
-                  <a:lnTo>
-                    <a:pt x="1360827" y="840902"/>
-                  </a:lnTo>
-                  <a:lnTo>
-                    <a:pt x="1289205" y="803620"/>
-                  </a:lnTo>
-                  <a:lnTo>
-                    <a:pt x="1217582" y="765643"/>
-                  </a:lnTo>
-                  <a:lnTo>
-                    <a:pt x="1145960" y="726957"/>
-                  </a:lnTo>
-                  <a:lnTo>
-                    <a:pt x="1074337" y="687548"/>
-                  </a:lnTo>
-                  <a:lnTo>
-                    <a:pt x="1002715" y="647405"/>
-                  </a:lnTo>
-                  <a:lnTo>
-                    <a:pt x="931092" y="606512"/>
-                  </a:lnTo>
-                  <a:lnTo>
-                    <a:pt x="859470" y="564856"/>
-                  </a:lnTo>
-                  <a:lnTo>
-                    <a:pt x="787847" y="522423"/>
-                  </a:lnTo>
-                  <a:lnTo>
-                    <a:pt x="716225" y="479197"/>
-                  </a:lnTo>
-                  <a:lnTo>
-                    <a:pt x="644602" y="435166"/>
-                  </a:lnTo>
-                  <a:lnTo>
-                    <a:pt x="572980" y="390312"/>
-                  </a:lnTo>
-                  <a:lnTo>
-                    <a:pt x="501357" y="344621"/>
-                  </a:lnTo>
-                  <a:lnTo>
-                    <a:pt x="429735" y="298078"/>
-                  </a:lnTo>
-                  <a:lnTo>
-                    <a:pt x="358112" y="250666"/>
-                  </a:lnTo>
-                  <a:lnTo>
-                    <a:pt x="286490" y="202369"/>
-                  </a:lnTo>
-                  <a:lnTo>
-                    <a:pt x="214867" y="153171"/>
-                  </a:lnTo>
-                  <a:lnTo>
-                    <a:pt x="143245" y="103055"/>
-                  </a:lnTo>
-                  <a:lnTo>
-                    <a:pt x="71622" y="52004"/>
+                    <a:pt x="7019007" y="2668698"/>
+                  </a:lnTo>
+                  <a:lnTo>
+                    <a:pt x="6947385" y="2659437"/>
+                  </a:lnTo>
+                  <a:lnTo>
+                    <a:pt x="6875762" y="2649749"/>
+                  </a:lnTo>
+                  <a:lnTo>
+                    <a:pt x="6804139" y="2639615"/>
+                  </a:lnTo>
+                  <a:lnTo>
+                    <a:pt x="6732517" y="2629012"/>
+                  </a:lnTo>
+                  <a:lnTo>
+                    <a:pt x="6660894" y="2617921"/>
+                  </a:lnTo>
+                  <a:lnTo>
+                    <a:pt x="6589272" y="2606319"/>
+                  </a:lnTo>
+                  <a:lnTo>
+                    <a:pt x="6517649" y="2594181"/>
+                  </a:lnTo>
+                  <a:lnTo>
+                    <a:pt x="6446027" y="2581484"/>
+                  </a:lnTo>
+                  <a:lnTo>
+                    <a:pt x="6374404" y="2568201"/>
+                  </a:lnTo>
+                  <a:lnTo>
+                    <a:pt x="6302782" y="2554306"/>
+                  </a:lnTo>
+                  <a:lnTo>
+                    <a:pt x="6231159" y="2539770"/>
+                  </a:lnTo>
+                  <a:lnTo>
+                    <a:pt x="6159537" y="2524564"/>
+                  </a:lnTo>
+                  <a:lnTo>
+                    <a:pt x="6087914" y="2508656"/>
+                  </a:lnTo>
+                  <a:lnTo>
+                    <a:pt x="6016292" y="2492015"/>
+                  </a:lnTo>
+                  <a:lnTo>
+                    <a:pt x="5944669" y="2474607"/>
+                  </a:lnTo>
+                  <a:lnTo>
+                    <a:pt x="5873047" y="2456396"/>
+                  </a:lnTo>
+                  <a:lnTo>
+                    <a:pt x="5801424" y="2437345"/>
+                  </a:lnTo>
+                  <a:lnTo>
+                    <a:pt x="5729802" y="2417415"/>
+                  </a:lnTo>
+                  <a:lnTo>
+                    <a:pt x="5658179" y="2396567"/>
+                  </a:lnTo>
+                  <a:lnTo>
+                    <a:pt x="5586557" y="2374757"/>
+                  </a:lnTo>
+                  <a:lnTo>
+                    <a:pt x="5514934" y="2351941"/>
+                  </a:lnTo>
+                  <a:lnTo>
+                    <a:pt x="5443311" y="2328073"/>
+                  </a:lnTo>
+                  <a:lnTo>
+                    <a:pt x="5371689" y="2303105"/>
+                  </a:lnTo>
+                  <a:lnTo>
+                    <a:pt x="5300066" y="2276985"/>
+                  </a:lnTo>
+                  <a:lnTo>
+                    <a:pt x="5228444" y="2249661"/>
+                  </a:lnTo>
+                  <a:lnTo>
+                    <a:pt x="5156821" y="2221077"/>
+                  </a:lnTo>
+                  <a:lnTo>
+                    <a:pt x="5085199" y="2191175"/>
+                  </a:lnTo>
+                  <a:lnTo>
+                    <a:pt x="5013576" y="2159893"/>
+                  </a:lnTo>
+                  <a:lnTo>
+                    <a:pt x="4941954" y="2127170"/>
+                  </a:lnTo>
+                  <a:lnTo>
+                    <a:pt x="4870331" y="2092937"/>
+                  </a:lnTo>
+                  <a:lnTo>
+                    <a:pt x="4798709" y="2057126"/>
+                  </a:lnTo>
+                  <a:lnTo>
+                    <a:pt x="4727086" y="2031685"/>
+                  </a:lnTo>
+                  <a:lnTo>
+                    <a:pt x="4655464" y="2015910"/>
+                  </a:lnTo>
+                  <a:lnTo>
+                    <a:pt x="4583841" y="1999838"/>
+                  </a:lnTo>
+                  <a:lnTo>
+                    <a:pt x="4512219" y="1983464"/>
+                  </a:lnTo>
+                  <a:lnTo>
+                    <a:pt x="4440596" y="1966782"/>
+                  </a:lnTo>
+                  <a:lnTo>
+                    <a:pt x="4368974" y="1949785"/>
+                  </a:lnTo>
+                  <a:lnTo>
+                    <a:pt x="4297351" y="1932468"/>
+                  </a:lnTo>
+                  <a:lnTo>
+                    <a:pt x="4225729" y="1914826"/>
+                  </a:lnTo>
+                  <a:lnTo>
+                    <a:pt x="4154106" y="1896851"/>
+                  </a:lnTo>
+                  <a:lnTo>
+                    <a:pt x="4082483" y="1878538"/>
+                  </a:lnTo>
+                  <a:lnTo>
+                    <a:pt x="4010861" y="1859880"/>
+                  </a:lnTo>
+                  <a:lnTo>
+                    <a:pt x="3939238" y="1840870"/>
+                  </a:lnTo>
+                  <a:lnTo>
+                    <a:pt x="3867616" y="1821503"/>
+                  </a:lnTo>
+                  <a:lnTo>
+                    <a:pt x="3795993" y="1801771"/>
+                  </a:lnTo>
+                  <a:lnTo>
+                    <a:pt x="3724371" y="1781668"/>
+                  </a:lnTo>
+                  <a:lnTo>
+                    <a:pt x="3652748" y="1761186"/>
+                  </a:lnTo>
+                  <a:lnTo>
+                    <a:pt x="3581126" y="1740319"/>
+                  </a:lnTo>
+                  <a:lnTo>
+                    <a:pt x="3509503" y="1719058"/>
+                  </a:lnTo>
+                  <a:lnTo>
+                    <a:pt x="3437881" y="1697397"/>
+                  </a:lnTo>
+                  <a:lnTo>
+                    <a:pt x="3366258" y="1675329"/>
+                  </a:lnTo>
+                  <a:lnTo>
+                    <a:pt x="3294636" y="1652845"/>
+                  </a:lnTo>
+                  <a:lnTo>
+                    <a:pt x="3223013" y="1629938"/>
+                  </a:lnTo>
+                  <a:lnTo>
+                    <a:pt x="3151391" y="1606599"/>
+                  </a:lnTo>
+                  <a:lnTo>
+                    <a:pt x="3079768" y="1582821"/>
+                  </a:lnTo>
+                  <a:lnTo>
+                    <a:pt x="3008146" y="1558596"/>
+                  </a:lnTo>
+                  <a:lnTo>
+                    <a:pt x="2936523" y="1533914"/>
+                  </a:lnTo>
+                  <a:lnTo>
+                    <a:pt x="2864901" y="1508767"/>
+                  </a:lnTo>
+                  <a:lnTo>
+                    <a:pt x="2793278" y="1483147"/>
+                  </a:lnTo>
+                  <a:lnTo>
+                    <a:pt x="2721655" y="1457045"/>
+                  </a:lnTo>
+                  <a:lnTo>
+                    <a:pt x="2650033" y="1430451"/>
+                  </a:lnTo>
+                  <a:lnTo>
+                    <a:pt x="2578410" y="1403357"/>
+                  </a:lnTo>
+                  <a:lnTo>
+                    <a:pt x="2506788" y="1375752"/>
+                  </a:lnTo>
+                  <a:lnTo>
+                    <a:pt x="2435165" y="1347628"/>
+                  </a:lnTo>
+                  <a:lnTo>
+                    <a:pt x="2363543" y="1318974"/>
+                  </a:lnTo>
+                  <a:lnTo>
+                    <a:pt x="2291920" y="1289781"/>
+                  </a:lnTo>
+                  <a:lnTo>
+                    <a:pt x="2220298" y="1260038"/>
+                  </a:lnTo>
+                  <a:lnTo>
+                    <a:pt x="2148675" y="1229735"/>
+                  </a:lnTo>
+                  <a:lnTo>
+                    <a:pt x="2077053" y="1198862"/>
+                  </a:lnTo>
+                  <a:lnTo>
+                    <a:pt x="2005430" y="1167407"/>
+                  </a:lnTo>
+                  <a:lnTo>
+                    <a:pt x="1933808" y="1135360"/>
+                  </a:lnTo>
+                  <a:lnTo>
+                    <a:pt x="1862185" y="1102710"/>
+                  </a:lnTo>
+                  <a:lnTo>
+                    <a:pt x="1790563" y="1069445"/>
+                  </a:lnTo>
+                  <a:lnTo>
+                    <a:pt x="1718940" y="1035553"/>
+                  </a:lnTo>
+                  <a:lnTo>
+                    <a:pt x="1647318" y="1001024"/>
+                  </a:lnTo>
+                  <a:lnTo>
+                    <a:pt x="1575695" y="965845"/>
+                  </a:lnTo>
+                  <a:lnTo>
+                    <a:pt x="1504073" y="930003"/>
+                  </a:lnTo>
+                  <a:lnTo>
+                    <a:pt x="1432450" y="893486"/>
+                  </a:lnTo>
+                  <a:lnTo>
+                    <a:pt x="1360827" y="856282"/>
+                  </a:lnTo>
+                  <a:lnTo>
+                    <a:pt x="1289205" y="818377"/>
+                  </a:lnTo>
+                  <a:lnTo>
+                    <a:pt x="1217582" y="779759"/>
+                  </a:lnTo>
+                  <a:lnTo>
+                    <a:pt x="1145960" y="740413"/>
+                  </a:lnTo>
+                  <a:lnTo>
+                    <a:pt x="1074337" y="700327"/>
+                  </a:lnTo>
+                  <a:lnTo>
+                    <a:pt x="1002715" y="659486"/>
+                  </a:lnTo>
+                  <a:lnTo>
+                    <a:pt x="931092" y="617876"/>
+                  </a:lnTo>
+                  <a:lnTo>
+                    <a:pt x="859470" y="575483"/>
+                  </a:lnTo>
+                  <a:lnTo>
+                    <a:pt x="787847" y="532292"/>
+                  </a:lnTo>
+                  <a:lnTo>
+                    <a:pt x="716225" y="488287"/>
+                  </a:lnTo>
+                  <a:lnTo>
+                    <a:pt x="644602" y="443454"/>
+                  </a:lnTo>
+                  <a:lnTo>
+                    <a:pt x="572980" y="397777"/>
+                  </a:lnTo>
+                  <a:lnTo>
+                    <a:pt x="501357" y="351239"/>
+                  </a:lnTo>
+                  <a:lnTo>
+                    <a:pt x="429735" y="303826"/>
+                  </a:lnTo>
+                  <a:lnTo>
+                    <a:pt x="358112" y="255520"/>
+                  </a:lnTo>
+                  <a:lnTo>
+                    <a:pt x="286490" y="206304"/>
+                  </a:lnTo>
+                  <a:lnTo>
+                    <a:pt x="214867" y="156162"/>
+                  </a:lnTo>
+                  <a:lnTo>
+                    <a:pt x="143245" y="105076"/>
+                  </a:lnTo>
+                  <a:lnTo>
+                    <a:pt x="71622" y="53028"/>
                   </a:lnTo>
                   <a:lnTo>
                     <a:pt x="0" y="0"/>
@@ -4122,249 +4122,249 @@
           </p:nvSpPr>
           <p:spPr>
             <a:xfrm>
-              <a:off x="2698380" y="2073503"/>
-              <a:ext cx="5564298" cy="3187594"/>
+              <a:off x="2712623" y="2073503"/>
+              <a:ext cx="5550055" cy="3188933"/>
             </a:xfrm>
             <a:custGeom>
               <a:avLst/>
               <a:pathLst>
-                <a:path w="5564298" h="3187594">
+                <a:path w="5550055" h="3188933">
                   <a:moveTo>
                     <a:pt x="0" y="0"/>
                   </a:moveTo>
                   <a:lnTo>
-                    <a:pt x="49364" y="75719"/>
-                  </a:lnTo>
-                  <a:lnTo>
-                    <a:pt x="120986" y="182150"/>
-                  </a:lnTo>
-                  <a:lnTo>
-                    <a:pt x="192609" y="285257"/>
-                  </a:lnTo>
-                  <a:lnTo>
-                    <a:pt x="264231" y="385144"/>
-                  </a:lnTo>
-                  <a:lnTo>
-                    <a:pt x="335854" y="481911"/>
-                  </a:lnTo>
-                  <a:lnTo>
-                    <a:pt x="407476" y="575657"/>
-                  </a:lnTo>
-                  <a:lnTo>
-                    <a:pt x="479099" y="666475"/>
-                  </a:lnTo>
-                  <a:lnTo>
-                    <a:pt x="550721" y="754456"/>
-                  </a:lnTo>
-                  <a:lnTo>
-                    <a:pt x="622344" y="839691"/>
-                  </a:lnTo>
-                  <a:lnTo>
-                    <a:pt x="693966" y="922263"/>
-                  </a:lnTo>
-                  <a:lnTo>
-                    <a:pt x="765589" y="1002257"/>
-                  </a:lnTo>
-                  <a:lnTo>
-                    <a:pt x="837212" y="1079752"/>
-                  </a:lnTo>
-                  <a:lnTo>
-                    <a:pt x="908834" y="1154827"/>
-                  </a:lnTo>
-                  <a:lnTo>
-                    <a:pt x="980457" y="1227558"/>
-                  </a:lnTo>
-                  <a:lnTo>
-                    <a:pt x="1052079" y="1298017"/>
-                  </a:lnTo>
-                  <a:lnTo>
-                    <a:pt x="1123702" y="1366277"/>
-                  </a:lnTo>
-                  <a:lnTo>
-                    <a:pt x="1195324" y="1432404"/>
-                  </a:lnTo>
-                  <a:lnTo>
-                    <a:pt x="1266947" y="1496466"/>
-                  </a:lnTo>
-                  <a:lnTo>
-                    <a:pt x="1338569" y="1558528"/>
-                  </a:lnTo>
-                  <a:lnTo>
-                    <a:pt x="1410192" y="1618651"/>
-                  </a:lnTo>
-                  <a:lnTo>
-                    <a:pt x="1481814" y="1676897"/>
-                  </a:lnTo>
-                  <a:lnTo>
-                    <a:pt x="1553437" y="1733324"/>
-                  </a:lnTo>
-                  <a:lnTo>
-                    <a:pt x="1625059" y="1787988"/>
-                  </a:lnTo>
-                  <a:lnTo>
-                    <a:pt x="1696682" y="1840946"/>
-                  </a:lnTo>
-                  <a:lnTo>
-                    <a:pt x="1768304" y="1892250"/>
-                  </a:lnTo>
-                  <a:lnTo>
-                    <a:pt x="1839927" y="1941951"/>
-                  </a:lnTo>
-                  <a:lnTo>
-                    <a:pt x="1911549" y="1990101"/>
-                  </a:lnTo>
-                  <a:lnTo>
-                    <a:pt x="1983172" y="2036746"/>
-                  </a:lnTo>
-                  <a:lnTo>
-                    <a:pt x="2054794" y="2081935"/>
-                  </a:lnTo>
-                  <a:lnTo>
-                    <a:pt x="2126417" y="2125713"/>
-                  </a:lnTo>
-                  <a:lnTo>
-                    <a:pt x="2198040" y="2168123"/>
-                  </a:lnTo>
-                  <a:lnTo>
-                    <a:pt x="2269662" y="2209210"/>
-                  </a:lnTo>
-                  <a:lnTo>
-                    <a:pt x="2341285" y="2249013"/>
-                  </a:lnTo>
-                  <a:lnTo>
-                    <a:pt x="2412907" y="2287573"/>
-                  </a:lnTo>
-                  <a:lnTo>
-                    <a:pt x="2484530" y="2324928"/>
-                  </a:lnTo>
-                  <a:lnTo>
-                    <a:pt x="2556152" y="2361118"/>
-                  </a:lnTo>
-                  <a:lnTo>
-                    <a:pt x="2627775" y="2396177"/>
-                  </a:lnTo>
-                  <a:lnTo>
-                    <a:pt x="2699397" y="2430141"/>
-                  </a:lnTo>
-                  <a:lnTo>
-                    <a:pt x="2771020" y="2463044"/>
-                  </a:lnTo>
-                  <a:lnTo>
-                    <a:pt x="2842642" y="2494920"/>
-                  </a:lnTo>
-                  <a:lnTo>
-                    <a:pt x="2914265" y="2525801"/>
-                  </a:lnTo>
-                  <a:lnTo>
-                    <a:pt x="2985887" y="2555717"/>
-                  </a:lnTo>
-                  <a:lnTo>
-                    <a:pt x="3057510" y="2584699"/>
-                  </a:lnTo>
-                  <a:lnTo>
-                    <a:pt x="3129132" y="2612775"/>
-                  </a:lnTo>
-                  <a:lnTo>
-                    <a:pt x="3200755" y="2639975"/>
-                  </a:lnTo>
-                  <a:lnTo>
-                    <a:pt x="3272377" y="2666326"/>
-                  </a:lnTo>
-                  <a:lnTo>
-                    <a:pt x="3344000" y="2691853"/>
-                  </a:lnTo>
-                  <a:lnTo>
-                    <a:pt x="3415622" y="2716584"/>
-                  </a:lnTo>
-                  <a:lnTo>
-                    <a:pt x="3487245" y="2740542"/>
-                  </a:lnTo>
-                  <a:lnTo>
-                    <a:pt x="3558868" y="2763752"/>
-                  </a:lnTo>
-                  <a:lnTo>
-                    <a:pt x="3630490" y="2786237"/>
-                  </a:lnTo>
-                  <a:lnTo>
-                    <a:pt x="3702113" y="2808019"/>
-                  </a:lnTo>
-                  <a:lnTo>
-                    <a:pt x="3773735" y="2829122"/>
-                  </a:lnTo>
-                  <a:lnTo>
-                    <a:pt x="3845358" y="2849565"/>
-                  </a:lnTo>
-                  <a:lnTo>
-                    <a:pt x="3916980" y="2869371"/>
-                  </a:lnTo>
-                  <a:lnTo>
-                    <a:pt x="3988603" y="2888557"/>
-                  </a:lnTo>
-                  <a:lnTo>
-                    <a:pt x="4060225" y="2907145"/>
-                  </a:lnTo>
-                  <a:lnTo>
-                    <a:pt x="4131848" y="2925152"/>
-                  </a:lnTo>
-                  <a:lnTo>
-                    <a:pt x="4203470" y="2942596"/>
-                  </a:lnTo>
-                  <a:lnTo>
-                    <a:pt x="4275093" y="2959496"/>
-                  </a:lnTo>
-                  <a:lnTo>
-                    <a:pt x="4346715" y="2975868"/>
-                  </a:lnTo>
-                  <a:lnTo>
-                    <a:pt x="4418338" y="2991729"/>
-                  </a:lnTo>
-                  <a:lnTo>
-                    <a:pt x="4489960" y="3007094"/>
-                  </a:lnTo>
-                  <a:lnTo>
-                    <a:pt x="4561583" y="3021980"/>
-                  </a:lnTo>
-                  <a:lnTo>
-                    <a:pt x="4633205" y="3036400"/>
-                  </a:lnTo>
-                  <a:lnTo>
-                    <a:pt x="4704828" y="3050371"/>
-                  </a:lnTo>
-                  <a:lnTo>
-                    <a:pt x="4776450" y="3063905"/>
-                  </a:lnTo>
-                  <a:lnTo>
-                    <a:pt x="4848073" y="3077016"/>
-                  </a:lnTo>
-                  <a:lnTo>
-                    <a:pt x="4919696" y="3089718"/>
-                  </a:lnTo>
-                  <a:lnTo>
-                    <a:pt x="4991318" y="3102023"/>
-                  </a:lnTo>
-                  <a:lnTo>
-                    <a:pt x="5062941" y="3113944"/>
-                  </a:lnTo>
-                  <a:lnTo>
-                    <a:pt x="5134563" y="3125493"/>
-                  </a:lnTo>
-                  <a:lnTo>
-                    <a:pt x="5206186" y="3136681"/>
-                  </a:lnTo>
-                  <a:lnTo>
-                    <a:pt x="5277808" y="3147520"/>
-                  </a:lnTo>
-                  <a:lnTo>
-                    <a:pt x="5349431" y="3158020"/>
-                  </a:lnTo>
-                  <a:lnTo>
-                    <a:pt x="5421053" y="3168192"/>
-                  </a:lnTo>
-                  <a:lnTo>
-                    <a:pt x="5492676" y="3178047"/>
-                  </a:lnTo>
-                  <a:lnTo>
-                    <a:pt x="5564298" y="3187594"/>
+                    <a:pt x="35121" y="54450"/>
+                  </a:lnTo>
+                  <a:lnTo>
+                    <a:pt x="106743" y="162009"/>
+                  </a:lnTo>
+                  <a:lnTo>
+                    <a:pt x="178366" y="266195"/>
+                  </a:lnTo>
+                  <a:lnTo>
+                    <a:pt x="249988" y="367112"/>
+                  </a:lnTo>
+                  <a:lnTo>
+                    <a:pt x="321611" y="464865"/>
+                  </a:lnTo>
+                  <a:lnTo>
+                    <a:pt x="393233" y="559551"/>
+                  </a:lnTo>
+                  <a:lnTo>
+                    <a:pt x="464856" y="651268"/>
+                  </a:lnTo>
+                  <a:lnTo>
+                    <a:pt x="536478" y="740107"/>
+                  </a:lnTo>
+                  <a:lnTo>
+                    <a:pt x="608101" y="826161"/>
+                  </a:lnTo>
+                  <a:lnTo>
+                    <a:pt x="679723" y="909515"/>
+                  </a:lnTo>
+                  <a:lnTo>
+                    <a:pt x="751346" y="990255"/>
+                  </a:lnTo>
+                  <a:lnTo>
+                    <a:pt x="822968" y="1068463"/>
+                  </a:lnTo>
+                  <a:lnTo>
+                    <a:pt x="894591" y="1144218"/>
+                  </a:lnTo>
+                  <a:lnTo>
+                    <a:pt x="966213" y="1217596"/>
+                  </a:lnTo>
+                  <a:lnTo>
+                    <a:pt x="1037836" y="1288674"/>
+                  </a:lnTo>
+                  <a:lnTo>
+                    <a:pt x="1109458" y="1357521"/>
+                  </a:lnTo>
+                  <a:lnTo>
+                    <a:pt x="1181081" y="1424210"/>
+                  </a:lnTo>
+                  <a:lnTo>
+                    <a:pt x="1252704" y="1488807"/>
+                  </a:lnTo>
+                  <a:lnTo>
+                    <a:pt x="1324326" y="1551377"/>
+                  </a:lnTo>
+                  <a:lnTo>
+                    <a:pt x="1395949" y="1611986"/>
+                  </a:lnTo>
+                  <a:lnTo>
+                    <a:pt x="1467571" y="1670693"/>
+                  </a:lnTo>
+                  <a:lnTo>
+                    <a:pt x="1539194" y="1727559"/>
+                  </a:lnTo>
+                  <a:lnTo>
+                    <a:pt x="1610816" y="1782641"/>
+                  </a:lnTo>
+                  <a:lnTo>
+                    <a:pt x="1682439" y="1835996"/>
+                  </a:lnTo>
+                  <a:lnTo>
+                    <a:pt x="1754061" y="1887677"/>
+                  </a:lnTo>
+                  <a:lnTo>
+                    <a:pt x="1825684" y="1937737"/>
+                  </a:lnTo>
+                  <a:lnTo>
+                    <a:pt x="1897306" y="1986228"/>
+                  </a:lnTo>
+                  <a:lnTo>
+                    <a:pt x="1968929" y="2033197"/>
+                  </a:lnTo>
+                  <a:lnTo>
+                    <a:pt x="2040551" y="2078693"/>
+                  </a:lnTo>
+                  <a:lnTo>
+                    <a:pt x="2112174" y="2122762"/>
+                  </a:lnTo>
+                  <a:lnTo>
+                    <a:pt x="2183796" y="2165449"/>
+                  </a:lnTo>
+                  <a:lnTo>
+                    <a:pt x="2255419" y="2206797"/>
+                  </a:lnTo>
+                  <a:lnTo>
+                    <a:pt x="2327041" y="2246848"/>
+                  </a:lnTo>
+                  <a:lnTo>
+                    <a:pt x="2398664" y="2285643"/>
+                  </a:lnTo>
+                  <a:lnTo>
+                    <a:pt x="2470286" y="2323221"/>
+                  </a:lnTo>
+                  <a:lnTo>
+                    <a:pt x="2541909" y="2359621"/>
+                  </a:lnTo>
+                  <a:lnTo>
+                    <a:pt x="2613532" y="2394879"/>
+                  </a:lnTo>
+                  <a:lnTo>
+                    <a:pt x="2685154" y="2429031"/>
+                  </a:lnTo>
+                  <a:lnTo>
+                    <a:pt x="2756777" y="2462112"/>
+                  </a:lnTo>
+                  <a:lnTo>
+                    <a:pt x="2828399" y="2494155"/>
+                  </a:lnTo>
+                  <a:lnTo>
+                    <a:pt x="2900022" y="2525193"/>
+                  </a:lnTo>
+                  <a:lnTo>
+                    <a:pt x="2971644" y="2555258"/>
+                  </a:lnTo>
+                  <a:lnTo>
+                    <a:pt x="3043267" y="2584380"/>
+                  </a:lnTo>
+                  <a:lnTo>
+                    <a:pt x="3114889" y="2612588"/>
+                  </a:lnTo>
+                  <a:lnTo>
+                    <a:pt x="3186512" y="2639912"/>
+                  </a:lnTo>
+                  <a:lnTo>
+                    <a:pt x="3258134" y="2666378"/>
+                  </a:lnTo>
+                  <a:lnTo>
+                    <a:pt x="3329757" y="2692015"/>
+                  </a:lnTo>
+                  <a:lnTo>
+                    <a:pt x="3401379" y="2716847"/>
+                  </a:lnTo>
+                  <a:lnTo>
+                    <a:pt x="3473002" y="2740901"/>
+                  </a:lnTo>
+                  <a:lnTo>
+                    <a:pt x="3544624" y="2764200"/>
+                  </a:lnTo>
+                  <a:lnTo>
+                    <a:pt x="3616247" y="2786768"/>
+                  </a:lnTo>
+                  <a:lnTo>
+                    <a:pt x="3687869" y="2808629"/>
+                  </a:lnTo>
+                  <a:lnTo>
+                    <a:pt x="3759492" y="2829804"/>
+                  </a:lnTo>
+                  <a:lnTo>
+                    <a:pt x="3831114" y="2850315"/>
+                  </a:lnTo>
+                  <a:lnTo>
+                    <a:pt x="3902737" y="2870182"/>
+                  </a:lnTo>
+                  <a:lnTo>
+                    <a:pt x="3974360" y="2889426"/>
+                  </a:lnTo>
+                  <a:lnTo>
+                    <a:pt x="4045982" y="2908067"/>
+                  </a:lnTo>
+                  <a:lnTo>
+                    <a:pt x="4117605" y="2926123"/>
+                  </a:lnTo>
+                  <a:lnTo>
+                    <a:pt x="4189227" y="2943613"/>
+                  </a:lnTo>
+                  <a:lnTo>
+                    <a:pt x="4260850" y="2960554"/>
+                  </a:lnTo>
+                  <a:lnTo>
+                    <a:pt x="4332472" y="2976964"/>
+                  </a:lnTo>
+                  <a:lnTo>
+                    <a:pt x="4404095" y="2992859"/>
+                  </a:lnTo>
+                  <a:lnTo>
+                    <a:pt x="4475717" y="3008255"/>
+                  </a:lnTo>
+                  <a:lnTo>
+                    <a:pt x="4547340" y="3023169"/>
+                  </a:lnTo>
+                  <a:lnTo>
+                    <a:pt x="4618962" y="3037615"/>
+                  </a:lnTo>
+                  <a:lnTo>
+                    <a:pt x="4690585" y="3051608"/>
+                  </a:lnTo>
+                  <a:lnTo>
+                    <a:pt x="4762207" y="3065161"/>
+                  </a:lnTo>
+                  <a:lnTo>
+                    <a:pt x="4833830" y="3078290"/>
+                  </a:lnTo>
+                  <a:lnTo>
+                    <a:pt x="4905452" y="3091007"/>
+                  </a:lnTo>
+                  <a:lnTo>
+                    <a:pt x="4977075" y="3103325"/>
+                  </a:lnTo>
+                  <a:lnTo>
+                    <a:pt x="5048697" y="3115257"/>
+                  </a:lnTo>
+                  <a:lnTo>
+                    <a:pt x="5120320" y="3126815"/>
+                  </a:lnTo>
+                  <a:lnTo>
+                    <a:pt x="5191942" y="3138010"/>
+                  </a:lnTo>
+                  <a:lnTo>
+                    <a:pt x="5263565" y="3148854"/>
+                  </a:lnTo>
+                  <a:lnTo>
+                    <a:pt x="5335187" y="3159358"/>
+                  </a:lnTo>
+                  <a:lnTo>
+                    <a:pt x="5406810" y="3169532"/>
+                  </a:lnTo>
+                  <a:lnTo>
+                    <a:pt x="5478433" y="3179387"/>
+                  </a:lnTo>
+                  <a:lnTo>
+                    <a:pt x="5550055" y="3188933"/>
                   </a:lnTo>
                 </a:path>
               </a:pathLst>
@@ -5104,7 +5104,7 @@
                   <a:latin typeface="Helvetica"/>
                   <a:cs typeface="Helvetica"/>
                 </a:rPr>
-                <a:t>HR per 10 mL/min decline: 1.47 (1.25-1.73), p_Bonf = &lt;0.001 (n = 6)  |  per IQR decline (Δ = 23.3): 2.45 (1.69-3.57)  |  IQR: [-12.8, 10.5]</a:t>
+                <a:t>HR per 10 mL/min decline: 1.47 (1.25-1.73), p_Bonf = &lt;0.001 (n = 6)  |  per IQR decline (Δ = 23.3): 2.46 (1.69-3.58)  |  IQR: [-12.8, 10.5]</a:t>
               </a:r>
             </a:p>
           </p:txBody>
